--- a/curso/pptx/S05.pptx
+++ b/curso/pptx/S05.pptx
@@ -4818,7 +4818,7 @@
                 </a:solidFill>
                 <a:latin typeface="Nunito Sans"/>
               </a:rPr>
-              <a:t>迈伦（Maialen）相信一种祛痘膏有效。她那一伙朋友都在用，她最喜欢的网红在做广告，而且她自己也特别期待。</a:t>
+              <a:t>一个女孩相信一种祛痘膏有效。她那一伙朋友都在用，她最喜欢的网红在做广告，而且她自己也特别期待。</a:t>
             </a:r>
           </a:p>
         </p:txBody>
@@ -5181,7 +5181,7 @@
                 </a:solidFill>
                 <a:latin typeface="Nunito Sans"/>
               </a:rPr>
-              <a:t>陈（Chen）相信地球绕着太阳转。他从来没有验证过：是他的老师给他讲的。</a:t>
+              <a:t>一个男孩相信地球绕着太阳转。他从来没有验证过：是他的老师给他讲的。</a:t>
             </a:r>
           </a:p>
         </p:txBody>
